--- a/names.pptx
+++ b/names.pptx
@@ -254,7 +254,7 @@
             <a:fld id="{A9F97C9E-53CF-4710-B4F7-20A7039B9428}" type="datetimeFigureOut">
               <a:rPr lang="el-GR" smtClean="0"/>
               <a:pPr/>
-              <a:t>3/10/2024</a:t>
+              <a:t>7/10/2024</a:t>
             </a:fld>
             <a:endParaRPr lang="el-GR"/>
           </a:p>
@@ -421,7 +421,7 @@
             <a:fld id="{DC17DF70-03C8-4BDB-82BF-9C076E474B74}" type="datetimeFigureOut">
               <a:rPr lang="el-GR" smtClean="0"/>
               <a:pPr/>
-              <a:t>3/10/2024</a:t>
+              <a:t>7/10/2024</a:t>
             </a:fld>
             <a:endParaRPr lang="el-GR"/>
           </a:p>
@@ -1900,7 +1900,7 @@
             <a:fld id="{1D8BD707-D9CF-40AE-B4C6-C98DA3205C09}" type="datetimeFigureOut">
               <a:rPr lang="en-US" smtClean="0"/>
               <a:pPr/>
-              <a:t>10/3/2024</a:t>
+              <a:t>10/7/2024</a:t>
             </a:fld>
             <a:endParaRPr lang="en-US"/>
           </a:p>
@@ -2260,7 +2260,7 @@
             <a:fld id="{1D8BD707-D9CF-40AE-B4C6-C98DA3205C09}" type="datetimeFigureOut">
               <a:rPr lang="en-US" smtClean="0"/>
               <a:pPr/>
-              <a:t>10/3/2024</a:t>
+              <a:t>10/7/2024</a:t>
             </a:fld>
             <a:endParaRPr lang="en-US"/>
           </a:p>
@@ -2436,7 +2436,7 @@
             <a:fld id="{1D8BD707-D9CF-40AE-B4C6-C98DA3205C09}" type="datetimeFigureOut">
               <a:rPr lang="en-US" smtClean="0"/>
               <a:pPr/>
-              <a:t>10/3/2024</a:t>
+              <a:t>10/7/2024</a:t>
             </a:fld>
             <a:endParaRPr lang="en-US"/>
           </a:p>
@@ -2672,7 +2672,7 @@
             <a:fld id="{1D8BD707-D9CF-40AE-B4C6-C98DA3205C09}" type="datetimeFigureOut">
               <a:rPr lang="en-US" smtClean="0"/>
               <a:pPr/>
-              <a:t>10/3/2024</a:t>
+              <a:t>10/7/2024</a:t>
             </a:fld>
             <a:endParaRPr lang="en-US"/>
           </a:p>
@@ -2942,7 +2942,7 @@
             <a:fld id="{1D8BD707-D9CF-40AE-B4C6-C98DA3205C09}" type="datetimeFigureOut">
               <a:rPr lang="en-US" smtClean="0"/>
               <a:pPr/>
-              <a:t>10/3/2024</a:t>
+              <a:t>10/7/2024</a:t>
             </a:fld>
             <a:endParaRPr lang="en-US"/>
           </a:p>
@@ -3163,7 +3163,7 @@
             <a:fld id="{1D8BD707-D9CF-40AE-B4C6-C98DA3205C09}" type="datetimeFigureOut">
               <a:rPr lang="en-US" smtClean="0"/>
               <a:pPr/>
-              <a:t>10/3/2024</a:t>
+              <a:t>10/7/2024</a:t>
             </a:fld>
             <a:endParaRPr lang="en-US"/>
           </a:p>
@@ -3516,7 +3516,7 @@
             <a:fld id="{1D8BD707-D9CF-40AE-B4C6-C98DA3205C09}" type="datetimeFigureOut">
               <a:rPr lang="en-US" smtClean="0"/>
               <a:pPr/>
-              <a:t>10/3/2024</a:t>
+              <a:t>10/7/2024</a:t>
             </a:fld>
             <a:endParaRPr lang="en-US"/>
           </a:p>
@@ -3749,7 +3749,7 @@
             <a:fld id="{1D8BD707-D9CF-40AE-B4C6-C98DA3205C09}" type="datetimeFigureOut">
               <a:rPr lang="en-US" smtClean="0"/>
               <a:pPr/>
-              <a:t>10/3/2024</a:t>
+              <a:t>10/7/2024</a:t>
             </a:fld>
             <a:endParaRPr lang="en-US"/>
           </a:p>
@@ -3891,7 +3891,7 @@
             <a:fld id="{1D8BD707-D9CF-40AE-B4C6-C98DA3205C09}" type="datetimeFigureOut">
               <a:rPr lang="en-US" smtClean="0"/>
               <a:pPr/>
-              <a:t>10/3/2024</a:t>
+              <a:t>10/7/2024</a:t>
             </a:fld>
             <a:endParaRPr lang="en-US"/>
           </a:p>
@@ -4169,7 +4169,7 @@
             <a:fld id="{1D8BD707-D9CF-40AE-B4C6-C98DA3205C09}" type="datetimeFigureOut">
               <a:rPr lang="en-US" smtClean="0"/>
               <a:pPr/>
-              <a:t>10/3/2024</a:t>
+              <a:t>10/7/2024</a:t>
             </a:fld>
             <a:endParaRPr lang="en-US"/>
           </a:p>
@@ -4577,7 +4577,7 @@
             <a:fld id="{1D8BD707-D9CF-40AE-B4C6-C98DA3205C09}" type="datetimeFigureOut">
               <a:rPr lang="en-US" smtClean="0"/>
               <a:pPr/>
-              <a:t>10/3/2024</a:t>
+              <a:t>10/7/2024</a:t>
             </a:fld>
             <a:endParaRPr lang="en-US"/>
           </a:p>
@@ -4915,7 +4915,7 @@
             <a:fld id="{1D8BD707-D9CF-40AE-B4C6-C98DA3205C09}" type="datetimeFigureOut">
               <a:rPr lang="en-US" smtClean="0"/>
               <a:pPr/>
-              <a:t>10/3/2024</a:t>
+              <a:t>10/7/2024</a:t>
             </a:fld>
             <a:endParaRPr lang="en-US"/>
           </a:p>
@@ -13638,12 +13638,20 @@
               <a:t>,  sometimes it is useful to use </a:t>
             </a:r>
             <a:r>
+              <a:rPr lang="en-US">
+                <a:solidFill>
+                  <a:srgbClr val="FF0000"/>
+                </a:solidFill>
+              </a:rPr>
+              <a:t>static creation </a:t>
+            </a:r>
+            <a:r>
               <a:rPr lang="en-US" dirty="0">
                 <a:solidFill>
                   <a:srgbClr val="FF0000"/>
                 </a:solidFill>
               </a:rPr>
-              <a:t>static factory methods </a:t>
+              <a:t>methods </a:t>
             </a:r>
             <a:r>
               <a:rPr lang="en-US" dirty="0"/>

--- a/names.pptx
+++ b/names.pptx
@@ -254,7 +254,7 @@
             <a:fld id="{A9F97C9E-53CF-4710-B4F7-20A7039B9428}" type="datetimeFigureOut">
               <a:rPr lang="el-GR" smtClean="0"/>
               <a:pPr/>
-              <a:t>7/10/2024</a:t>
+              <a:t>30/9/2025</a:t>
             </a:fld>
             <a:endParaRPr lang="el-GR"/>
           </a:p>
@@ -421,7 +421,7 @@
             <a:fld id="{DC17DF70-03C8-4BDB-82BF-9C076E474B74}" type="datetimeFigureOut">
               <a:rPr lang="el-GR" smtClean="0"/>
               <a:pPr/>
-              <a:t>7/10/2024</a:t>
+              <a:t>30/9/2025</a:t>
             </a:fld>
             <a:endParaRPr lang="el-GR"/>
           </a:p>
@@ -1900,7 +1900,7 @@
             <a:fld id="{1D8BD707-D9CF-40AE-B4C6-C98DA3205C09}" type="datetimeFigureOut">
               <a:rPr lang="en-US" smtClean="0"/>
               <a:pPr/>
-              <a:t>10/7/2024</a:t>
+              <a:t>9/30/2025</a:t>
             </a:fld>
             <a:endParaRPr lang="en-US"/>
           </a:p>
@@ -2260,7 +2260,7 @@
             <a:fld id="{1D8BD707-D9CF-40AE-B4C6-C98DA3205C09}" type="datetimeFigureOut">
               <a:rPr lang="en-US" smtClean="0"/>
               <a:pPr/>
-              <a:t>10/7/2024</a:t>
+              <a:t>9/30/2025</a:t>
             </a:fld>
             <a:endParaRPr lang="en-US"/>
           </a:p>
@@ -2436,7 +2436,7 @@
             <a:fld id="{1D8BD707-D9CF-40AE-B4C6-C98DA3205C09}" type="datetimeFigureOut">
               <a:rPr lang="en-US" smtClean="0"/>
               <a:pPr/>
-              <a:t>10/7/2024</a:t>
+              <a:t>9/30/2025</a:t>
             </a:fld>
             <a:endParaRPr lang="en-US"/>
           </a:p>
@@ -2672,7 +2672,7 @@
             <a:fld id="{1D8BD707-D9CF-40AE-B4C6-C98DA3205C09}" type="datetimeFigureOut">
               <a:rPr lang="en-US" smtClean="0"/>
               <a:pPr/>
-              <a:t>10/7/2024</a:t>
+              <a:t>9/30/2025</a:t>
             </a:fld>
             <a:endParaRPr lang="en-US"/>
           </a:p>
@@ -2942,7 +2942,7 @@
             <a:fld id="{1D8BD707-D9CF-40AE-B4C6-C98DA3205C09}" type="datetimeFigureOut">
               <a:rPr lang="en-US" smtClean="0"/>
               <a:pPr/>
-              <a:t>10/7/2024</a:t>
+              <a:t>9/30/2025</a:t>
             </a:fld>
             <a:endParaRPr lang="en-US"/>
           </a:p>
@@ -3163,7 +3163,7 @@
             <a:fld id="{1D8BD707-D9CF-40AE-B4C6-C98DA3205C09}" type="datetimeFigureOut">
               <a:rPr lang="en-US" smtClean="0"/>
               <a:pPr/>
-              <a:t>10/7/2024</a:t>
+              <a:t>9/30/2025</a:t>
             </a:fld>
             <a:endParaRPr lang="en-US"/>
           </a:p>
@@ -3516,7 +3516,7 @@
             <a:fld id="{1D8BD707-D9CF-40AE-B4C6-C98DA3205C09}" type="datetimeFigureOut">
               <a:rPr lang="en-US" smtClean="0"/>
               <a:pPr/>
-              <a:t>10/7/2024</a:t>
+              <a:t>9/30/2025</a:t>
             </a:fld>
             <a:endParaRPr lang="en-US"/>
           </a:p>
@@ -3749,7 +3749,7 @@
             <a:fld id="{1D8BD707-D9CF-40AE-B4C6-C98DA3205C09}" type="datetimeFigureOut">
               <a:rPr lang="en-US" smtClean="0"/>
               <a:pPr/>
-              <a:t>10/7/2024</a:t>
+              <a:t>9/30/2025</a:t>
             </a:fld>
             <a:endParaRPr lang="en-US"/>
           </a:p>
@@ -3891,7 +3891,7 @@
             <a:fld id="{1D8BD707-D9CF-40AE-B4C6-C98DA3205C09}" type="datetimeFigureOut">
               <a:rPr lang="en-US" smtClean="0"/>
               <a:pPr/>
-              <a:t>10/7/2024</a:t>
+              <a:t>9/30/2025</a:t>
             </a:fld>
             <a:endParaRPr lang="en-US"/>
           </a:p>
@@ -4169,7 +4169,7 @@
             <a:fld id="{1D8BD707-D9CF-40AE-B4C6-C98DA3205C09}" type="datetimeFigureOut">
               <a:rPr lang="en-US" smtClean="0"/>
               <a:pPr/>
-              <a:t>10/7/2024</a:t>
+              <a:t>9/30/2025</a:t>
             </a:fld>
             <a:endParaRPr lang="en-US"/>
           </a:p>
@@ -4577,7 +4577,7 @@
             <a:fld id="{1D8BD707-D9CF-40AE-B4C6-C98DA3205C09}" type="datetimeFigureOut">
               <a:rPr lang="en-US" smtClean="0"/>
               <a:pPr/>
-              <a:t>10/7/2024</a:t>
+              <a:t>9/30/2025</a:t>
             </a:fld>
             <a:endParaRPr lang="en-US"/>
           </a:p>
@@ -4915,7 +4915,7 @@
             <a:fld id="{1D8BD707-D9CF-40AE-B4C6-C98DA3205C09}" type="datetimeFigureOut">
               <a:rPr lang="en-US" smtClean="0"/>
               <a:pPr/>
-              <a:t>10/7/2024</a:t>
+              <a:t>9/30/2025</a:t>
             </a:fld>
             <a:endParaRPr lang="en-US"/>
           </a:p>
